--- a/dist/초2/수학/수와계산/초2_수학_수와계산_05_덧셈과뺄셈의관계_학생용.pptx
+++ b/dist/초2/수학/수와계산/초2_수학_수와계산_05_덧셈과뺄셈의관계_학생용.pptx
@@ -120,13 +120,13 @@
   <p:extLst>
     <p:ext uri="{521415D9-36F7-43E2-AB2F-B90AF26B5E84}">
       <p14:sectionLst xmlns:p14="http://schemas.microsoft.com/office/powerpoint/2010/main">
-        <p14:section name="도입" id="{b4d5d5e1-9345-b666-f238-c27dec61cf06}">
+        <p14:section name="도입" id="{1c82ef3c-63c6-aba7-25cc-c7b152891f96}">
           <p14:sldIdLst>
             <p14:sldId id="256"/>
             <p14:sldId id="257"/>
           </p14:sldIdLst>
         </p14:section>
-        <p14:section name="개념" id="{b9b4e4c8-11b6-c435-9476-712670c3cba5}">
+        <p14:section name="개념" id="{f9fd2004-b9eb-75b4-a711-4d89c6352b44}">
           <p14:sldIdLst>
             <p14:sldId id="258"/>
             <p14:sldId id="259"/>
@@ -135,31 +135,31 @@
             <p14:sldId id="264"/>
           </p14:sldIdLst>
         </p14:section>
-        <p14:section name="연습" id="{1e3abff5-26f9-33aa-b2e8-2d0115c6eab4}">
+        <p14:section name="연습" id="{062d32c3-0bb0-9655-9341-fa2c263a38d3}">
           <p14:sldIdLst>
             <p14:sldId id="261"/>
             <p14:sldId id="262"/>
             <p14:sldId id="265"/>
           </p14:sldIdLst>
         </p14:section>
-        <p14:section name="개념" id="{704f340a-83a8-9c35-1f6b-d018289ef620}">
+        <p14:section name="개념" id="{eb78714a-6d0d-0cc6-cc1c-29d10d11fca7}">
           <p14:sldIdLst/>
         </p14:section>
-        <p14:section name="연습" id="{8b3e6199-11b7-9e09-9e9e-fa8ff84366e4}">
+        <p14:section name="연습" id="{4e8d4d7a-f50d-c578-cb9e-40e87aa90699}">
           <p14:sldIdLst/>
         </p14:section>
-        <p14:section name="확인" id="{38739b50-84ef-d795-dbe4-fc4e12979c44}">
+        <p14:section name="확인" id="{a41cf91c-528b-4705-e792-b4cf89654526}">
           <p14:sldIdLst>
             <p14:sldId id="266"/>
             <p14:sldId id="267"/>
           </p14:sldIdLst>
         </p14:section>
-        <p14:section name="정리" id="{bb589700-8440-296b-8751-753aead8dd5b}">
+        <p14:section name="정리" id="{c5ef353b-8ff7-30f3-cabc-d10b7cef200a}">
           <p14:sldIdLst>
             <p14:sldId id="268"/>
           </p14:sldIdLst>
         </p14:section>
-        <p14:section name="보충" id="{167bd193-c341-64a6-0568-de066974c8e9}">
+        <p14:section name="보충" id="{9f2e61fa-d71e-8fe7-487f-793afbad7d1d}">
           <p14:sldIdLst>
             <p14:sldId id="269"/>
           </p14:sldIdLst>
